--- a/Slides/Semana 17/semana_17_slides.pptx
+++ b/Slides/Semana 17/semana_17_slides.pptx
@@ -14,15 +14,9 @@
     <p:sldId id="262" r:id="rId8"/>
     <p:sldId id="263" r:id="rId9"/>
     <p:sldId id="264" r:id="rId10"/>
-    <p:sldId id="265" r:id="rId11"/>
-    <p:sldId id="266" r:id="rId12"/>
-    <p:sldId id="267" r:id="rId13"/>
-    <p:sldId id="268" r:id="rId14"/>
-    <p:sldId id="269" r:id="rId15"/>
-    <p:sldId id="270" r:id="rId16"/>
   </p:sldIdLst>
   <p:notesMasterIdLst>
-    <p:notesMasterId r:id="rId17"/>
+    <p:notesMasterId r:id="rId11"/>
   </p:notesMasterIdLst>
   <p:sldSz cx="12192000" cy="6858000"/>
   <p:notesSz cx="6858000" cy="12192000"/>
@@ -516,7 +510,7 @@
           <a:p>
             <a:r>
               <a:rPr lang="en-US" dirty="0"/>
-              <a:t>Notas: Abertura da mini aula (20 min). Unidade V — Projeto Final e Apresentação. Crítica 🔴 FORMAL (CF6 / Projeto Final) — 40% da nota final, e a única semana em que TODOS os 10 critérios da rubrica recebem nota simultaneamente, incluindo C10 (Participação), até aqui só observado. Apostila: todos os capítulos — integração semestral. Mensagem central da capa: nas 16 semanas anteriores cada peça foi produzida isolada — UV, material, textura, bake, otimização, integração na Unity. Hoje nada tecnicamente novo é ensinado: pede-se ao estudante montar essas peças em uma narrativa coerente e defendê-la oralmente diante da turma e do professor. Esta mini aula deve ser breve e direta — o objetivo é reduzir ansiedade com clareza de formato, não adicionar conteúdo. Não prolongar além dos 20 min: o tempo de estúdio hoje é a própria defesa.</a:t>
+              <a:t>Notas: Unidade V — Projeto Final: Recuperação. Sem crítica coletiva ⚪ — feedback individual no atendimento. Apostila: conforme necessidade individual de cada estudante, sem leitura obrigatória nova. Carga horária 3h (2 encontros de 1h30). Mensagem central: esta semana não introduz nenhum conteúdo técnico novo. Ela existe exclusivamente para estudantes com entregas formais pendentes — de qualquer semana do semestre, da Semana 1 até a CF5 da Semana 16 — terem uma última oportunidade estruturada de reposição, com atendimento individual do professor. Não há crítica coletiva nem nova rodada de apresentações formais: o formato é de plantão de atendimento.</a:t>
             </a:r>
             <a:endParaRPr lang="en-US" dirty="0"/>
           </a:p>
@@ -540,539 +534,6 @@
             <a:fld id="{F7021451-1387-4CA6-816F-3879F97B5CBC}" type="slidenum">
               <a:rPr lang="en-US"/>
               <a:t>1</a:t>
-            </a:fld>
-            <a:endParaRPr lang="en-US"/>
-          </a:p>
-        </p:txBody>
-      </p:sp>
-    </p:spTree>
-    <p:extLst>
-      <p:ext uri="{BB962C8B-B14F-4D97-AF65-F5344CB8AC3E}">
-        <p14:creationId xmlns:p14="http://schemas.microsoft.com/office/powerpoint/2010/main" val="1024086991"/>
-      </p:ext>
-    </p:extLst>
-  </p:cSld>
-  <p:clrMapOvr>
-    <a:masterClrMapping/>
-  </p:clrMapOvr>
-</p:notes>
-</file>
-
-<file path=ppt/notesSlides/notesSlide10.xml><?xml version="1.0" encoding="utf-8"?>
-<p:notes xmlns:a="http://schemas.openxmlformats.org/drawingml/2006/main" xmlns:r="http://schemas.openxmlformats.org/officeDocument/2006/relationships" xmlns:p="http://schemas.openxmlformats.org/presentationml/2006/main">
-  <p:cSld>
-    <p:spTree>
-      <p:nvGrpSpPr>
-        <p:cNvPr id="1" name=""/>
-        <p:cNvGrpSpPr/>
-        <p:nvPr/>
-      </p:nvGrpSpPr>
-      <p:grpSpPr>
-        <a:xfrm>
-          <a:off x="0" y="0"/>
-          <a:ext cx="0" cy="0"/>
-          <a:chOff x="0" y="0"/>
-          <a:chExt cx="0" cy="0"/>
-        </a:xfrm>
-      </p:grpSpPr>
-      <p:sp>
-        <p:nvSpPr>
-          <p:cNvPr id="2" name="Slide Image Placeholder 1"/>
-          <p:cNvSpPr>
-            <a:spLocks noGrp="1" noRot="1" noChangeAspect="1"/>
-          </p:cNvSpPr>
-          <p:nvPr>
-            <p:ph type="sldImg"/>
-          </p:nvPr>
-        </p:nvSpPr>
-        <p:spPr/>
-      </p:sp>
-      <p:sp>
-        <p:nvSpPr>
-          <p:cNvPr id="3" name="Notes Placeholder 2"/>
-          <p:cNvSpPr>
-            <a:spLocks noGrp="1"/>
-          </p:cNvSpPr>
-          <p:nvPr>
-            <p:ph type="body" idx="1"/>
-          </p:nvPr>
-        </p:nvSpPr>
-        <p:spPr/>
-        <p:txBody>
-          <a:bodyPr/>
-          <a:lstStyle/>
-          <a:p>
-            <a:r>
-              <a:rPr lang="en-US" dirty="0"/>
-              <a:t>Notas: Item 3 (continuação). Mostrar que C5 (Texturização) tem o maior peso — coerente com ser o núcleo da disciplina. Tabela de referência da Rubrica Mestre para a CF6 / PF: C1 10%, C2 12%, C3 8%, C4 12%, C5 14%, C6 8%, C7 8%, C8 12%, C9 8%, C10 8%. NÃO é média simples dos critérios e NÃO é a mesma ponderação do Portfolio de Artefatos (PA). O estudante não precisa decorar a tabela — precisa saber que texturização, direção artística, materiais e Unity concentram o peso, orientando o que priorizar no breakdown. Evitar transformar isto em aula de planilha: é orientação, não cobrança de memorização.</a:t>
-            </a:r>
-            <a:endParaRPr lang="en-US" dirty="0"/>
-          </a:p>
-        </p:txBody>
-      </p:sp>
-      <p:sp>
-        <p:nvSpPr>
-          <p:cNvPr id="4" name="Slide Number Placeholder 3"/>
-          <p:cNvSpPr>
-            <a:spLocks noGrp="1"/>
-          </p:cNvSpPr>
-          <p:nvPr>
-            <p:ph type="sldNum" sz="quarter" idx="10"/>
-          </p:nvPr>
-        </p:nvSpPr>
-        <p:spPr/>
-        <p:txBody>
-          <a:bodyPr/>
-          <a:lstStyle/>
-          <a:p>
-            <a:fld id="{F7021451-1387-4CA6-816F-3879F97B5CBC}" type="slidenum">
-              <a:rPr lang="en-US"/>
-              <a:t>10</a:t>
-            </a:fld>
-            <a:endParaRPr lang="en-US"/>
-          </a:p>
-        </p:txBody>
-      </p:sp>
-    </p:spTree>
-    <p:extLst>
-      <p:ext uri="{BB962C8B-B14F-4D97-AF65-F5344CB8AC3E}">
-        <p14:creationId xmlns:p14="http://schemas.microsoft.com/office/powerpoint/2010/main" val="1024086991"/>
-      </p:ext>
-    </p:extLst>
-  </p:cSld>
-  <p:clrMapOvr>
-    <a:masterClrMapping/>
-  </p:clrMapOvr>
-</p:notes>
-</file>
-
-<file path=ppt/notesSlides/notesSlide11.xml><?xml version="1.0" encoding="utf-8"?>
-<p:notes xmlns:a="http://schemas.openxmlformats.org/drawingml/2006/main" xmlns:r="http://schemas.openxmlformats.org/officeDocument/2006/relationships" xmlns:p="http://schemas.openxmlformats.org/presentationml/2006/main">
-  <p:cSld>
-    <p:spTree>
-      <p:nvGrpSpPr>
-        <p:cNvPr id="1" name=""/>
-        <p:cNvGrpSpPr/>
-        <p:nvPr/>
-      </p:nvGrpSpPr>
-      <p:grpSpPr>
-        <a:xfrm>
-          <a:off x="0" y="0"/>
-          <a:ext cx="0" cy="0"/>
-          <a:chOff x="0" y="0"/>
-          <a:chExt cx="0" cy="0"/>
-        </a:xfrm>
-      </p:grpSpPr>
-      <p:sp>
-        <p:nvSpPr>
-          <p:cNvPr id="2" name="Slide Image Placeholder 1"/>
-          <p:cNvSpPr>
-            <a:spLocks noGrp="1" noRot="1" noChangeAspect="1"/>
-          </p:cNvSpPr>
-          <p:nvPr>
-            <p:ph type="sldImg"/>
-          </p:nvPr>
-        </p:nvSpPr>
-        <p:spPr/>
-      </p:sp>
-      <p:sp>
-        <p:nvSpPr>
-          <p:cNvPr id="3" name="Notes Placeholder 2"/>
-          <p:cNvSpPr>
-            <a:spLocks noGrp="1"/>
-          </p:cNvSpPr>
-          <p:nvPr>
-            <p:ph type="body" idx="1"/>
-          </p:nvPr>
-        </p:nvSpPr>
-        <p:spPr/>
-        <p:txBody>
-          <a:bodyPr/>
-          <a:lstStyle/>
-          <a:p>
-            <a:r>
-              <a:rPr lang="en-US" dirty="0"/>
-              <a:t>Notas: Item 4 da mini aula. Frase do plano: "Se vocês se avaliaram em 4 num critério e eu observar um 3, isso não vira automaticamente uma nota mais baixa — vira uma pergunta na hora da defesa: 'me mostra a evidência que te fez pensar em nível 4 aqui'. É a mesma lógica de justificar decisões que vocês praticam desde a Semana 3." Divergência entre autoavaliação e avaliação do professor é material de diálogo técnico, não confronto (Possíveis Dificuldades nº 3). Tratar como oportunidade, não erro a corrigir publicamente. Comparar a autoavaliação com o feedback recebido é o objetivo 3 do plano.</a:t>
-            </a:r>
-            <a:endParaRPr lang="en-US" dirty="0"/>
-          </a:p>
-        </p:txBody>
-      </p:sp>
-      <p:sp>
-        <p:nvSpPr>
-          <p:cNvPr id="4" name="Slide Number Placeholder 3"/>
-          <p:cNvSpPr>
-            <a:spLocks noGrp="1"/>
-          </p:cNvSpPr>
-          <p:nvPr>
-            <p:ph type="sldNum" sz="quarter" idx="10"/>
-          </p:nvPr>
-        </p:nvSpPr>
-        <p:spPr/>
-        <p:txBody>
-          <a:bodyPr/>
-          <a:lstStyle/>
-          <a:p>
-            <a:fld id="{F7021451-1387-4CA6-816F-3879F97B5CBC}" type="slidenum">
-              <a:rPr lang="en-US"/>
-              <a:t>11</a:t>
-            </a:fld>
-            <a:endParaRPr lang="en-US"/>
-          </a:p>
-        </p:txBody>
-      </p:sp>
-    </p:spTree>
-    <p:extLst>
-      <p:ext uri="{BB962C8B-B14F-4D97-AF65-F5344CB8AC3E}">
-        <p14:creationId xmlns:p14="http://schemas.microsoft.com/office/powerpoint/2010/main" val="1024086991"/>
-      </p:ext>
-    </p:extLst>
-  </p:cSld>
-  <p:clrMapOvr>
-    <a:masterClrMapping/>
-  </p:clrMapOvr>
-</p:notes>
-</file>
-
-<file path=ppt/notesSlides/notesSlide12.xml><?xml version="1.0" encoding="utf-8"?>
-<p:notes xmlns:a="http://schemas.openxmlformats.org/drawingml/2006/main" xmlns:r="http://schemas.openxmlformats.org/officeDocument/2006/relationships" xmlns:p="http://schemas.openxmlformats.org/presentationml/2006/main">
-  <p:cSld>
-    <p:spTree>
-      <p:nvGrpSpPr>
-        <p:cNvPr id="1" name=""/>
-        <p:cNvGrpSpPr/>
-        <p:nvPr/>
-      </p:nvGrpSpPr>
-      <p:grpSpPr>
-        <a:xfrm>
-          <a:off x="0" y="0"/>
-          <a:ext cx="0" cy="0"/>
-          <a:chOff x="0" y="0"/>
-          <a:chExt cx="0" cy="0"/>
-        </a:xfrm>
-      </p:grpSpPr>
-      <p:sp>
-        <p:nvSpPr>
-          <p:cNvPr id="2" name="Slide Image Placeholder 1"/>
-          <p:cNvSpPr>
-            <a:spLocks noGrp="1" noRot="1" noChangeAspect="1"/>
-          </p:cNvSpPr>
-          <p:nvPr>
-            <p:ph type="sldImg"/>
-          </p:nvPr>
-        </p:nvSpPr>
-        <p:spPr/>
-      </p:sp>
-      <p:sp>
-        <p:nvSpPr>
-          <p:cNvPr id="3" name="Notes Placeholder 2"/>
-          <p:cNvSpPr>
-            <a:spLocks noGrp="1"/>
-          </p:cNvSpPr>
-          <p:nvPr>
-            <p:ph type="body" idx="1"/>
-          </p:nvPr>
-        </p:nvSpPr>
-        <p:spPr/>
-        <p:txBody>
-          <a:bodyPr/>
-          <a:lstStyle/>
-          <a:p>
-            <a:r>
-              <a:rPr lang="en-US" dirty="0"/>
-              <a:t>Notas: Erros mais frequentes, das Possíveis Dificuldades do plano (nº 2, 3, 4, 5). Ao circular na preparação, caçar exatamente estes. Para o tempo: usar cronômetro visível e interromper com gentileza ao final dos 10 min. Para a defensividade: reforçar que tentativa de raciocínio vale em C10. Para o problema técnico: exigir teste prévio de abertura dos arquivos (idealmente já feito na S16) e ter renders/screenshots exportados como apoio caso o projeto Unity não abra ao vivo — o foco da defesa é explicar o processo, não depender do arquivo ao vivo.</a:t>
-            </a:r>
-            <a:endParaRPr lang="en-US" dirty="0"/>
-          </a:p>
-        </p:txBody>
-      </p:sp>
-      <p:sp>
-        <p:nvSpPr>
-          <p:cNvPr id="4" name="Slide Number Placeholder 3"/>
-          <p:cNvSpPr>
-            <a:spLocks noGrp="1"/>
-          </p:cNvSpPr>
-          <p:nvPr>
-            <p:ph type="sldNum" sz="quarter" idx="10"/>
-          </p:nvPr>
-        </p:nvSpPr>
-        <p:spPr/>
-        <p:txBody>
-          <a:bodyPr/>
-          <a:lstStyle/>
-          <a:p>
-            <a:fld id="{F7021451-1387-4CA6-816F-3879F97B5CBC}" type="slidenum">
-              <a:rPr lang="en-US"/>
-              <a:t>12</a:t>
-            </a:fld>
-            <a:endParaRPr lang="en-US"/>
-          </a:p>
-        </p:txBody>
-      </p:sp>
-    </p:spTree>
-    <p:extLst>
-      <p:ext uri="{BB962C8B-B14F-4D97-AF65-F5344CB8AC3E}">
-        <p14:creationId xmlns:p14="http://schemas.microsoft.com/office/powerpoint/2010/main" val="1024086991"/>
-      </p:ext>
-    </p:extLst>
-  </p:cSld>
-  <p:clrMapOvr>
-    <a:masterClrMapping/>
-  </p:clrMapOvr>
-</p:notes>
-</file>
-
-<file path=ppt/notesSlides/notesSlide13.xml><?xml version="1.0" encoding="utf-8"?>
-<p:notes xmlns:a="http://schemas.openxmlformats.org/drawingml/2006/main" xmlns:r="http://schemas.openxmlformats.org/officeDocument/2006/relationships" xmlns:p="http://schemas.openxmlformats.org/presentationml/2006/main">
-  <p:cSld>
-    <p:spTree>
-      <p:nvGrpSpPr>
-        <p:cNvPr id="1" name=""/>
-        <p:cNvGrpSpPr/>
-        <p:nvPr/>
-      </p:nvGrpSpPr>
-      <p:grpSpPr>
-        <a:xfrm>
-          <a:off x="0" y="0"/>
-          <a:ext cx="0" cy="0"/>
-          <a:chOff x="0" y="0"/>
-          <a:chExt cx="0" cy="0"/>
-        </a:xfrm>
-      </p:grpSpPr>
-      <p:sp>
-        <p:nvSpPr>
-          <p:cNvPr id="2" name="Slide Image Placeholder 1"/>
-          <p:cNvSpPr>
-            <a:spLocks noGrp="1" noRot="1" noChangeAspect="1"/>
-          </p:cNvSpPr>
-          <p:nvPr>
-            <p:ph type="sldImg"/>
-          </p:nvPr>
-        </p:nvSpPr>
-        <p:spPr/>
-      </p:sp>
-      <p:sp>
-        <p:nvSpPr>
-          <p:cNvPr id="3" name="Notes Placeholder 2"/>
-          <p:cNvSpPr>
-            <a:spLocks noGrp="1"/>
-          </p:cNvSpPr>
-          <p:nvPr>
-            <p:ph type="body" idx="1"/>
-          </p:nvPr>
-        </p:nvSpPr>
-        <p:spPr/>
-        <p:txBody>
-          <a:bodyPr/>
-          <a:lstStyle/>
-          <a:p>
-            <a:r>
-              <a:rPr lang="en-US" dirty="0"/>
-              <a:t>Notas: Contextualizar o valor profissional (Fechamento do plano). Saber apresentar e justificar o próprio trabalho é competência central na área de jogos — art reviews, entrevistas e milestones exigem exatamente isso. Reforçar que o portfólio produzido ao longo do semestre é um artefato real de empregabilidade, não um exercício de sala. O objetivo do encerramento é consolidar a metacognição sobre o processo de aprendizagem, não só sobre o produto. Não intimidar com padrão inatingível — a demonstração usa um kit de referência para calibrar expectativas de forma concreta.</a:t>
-            </a:r>
-            <a:endParaRPr lang="en-US" dirty="0"/>
-          </a:p>
-        </p:txBody>
-      </p:sp>
-      <p:sp>
-        <p:nvSpPr>
-          <p:cNvPr id="4" name="Slide Number Placeholder 3"/>
-          <p:cNvSpPr>
-            <a:spLocks noGrp="1"/>
-          </p:cNvSpPr>
-          <p:nvPr>
-            <p:ph type="sldNum" sz="quarter" idx="10"/>
-          </p:nvPr>
-        </p:nvSpPr>
-        <p:spPr/>
-        <p:txBody>
-          <a:bodyPr/>
-          <a:lstStyle/>
-          <a:p>
-            <a:fld id="{F7021451-1387-4CA6-816F-3879F97B5CBC}" type="slidenum">
-              <a:rPr lang="en-US"/>
-              <a:t>13</a:t>
-            </a:fld>
-            <a:endParaRPr lang="en-US"/>
-          </a:p>
-        </p:txBody>
-      </p:sp>
-    </p:spTree>
-    <p:extLst>
-      <p:ext uri="{BB962C8B-B14F-4D97-AF65-F5344CB8AC3E}">
-        <p14:creationId xmlns:p14="http://schemas.microsoft.com/office/powerpoint/2010/main" val="1024086991"/>
-      </p:ext>
-    </p:extLst>
-  </p:cSld>
-  <p:clrMapOvr>
-    <a:masterClrMapping/>
-  </p:clrMapOvr>
-</p:notes>
-</file>
-
-<file path=ppt/notesSlides/notesSlide14.xml><?xml version="1.0" encoding="utf-8"?>
-<p:notes xmlns:a="http://schemas.openxmlformats.org/drawingml/2006/main" xmlns:r="http://schemas.openxmlformats.org/officeDocument/2006/relationships" xmlns:p="http://schemas.openxmlformats.org/presentationml/2006/main">
-  <p:cSld>
-    <p:spTree>
-      <p:nvGrpSpPr>
-        <p:cNvPr id="1" name=""/>
-        <p:cNvGrpSpPr/>
-        <p:nvPr/>
-      </p:nvGrpSpPr>
-      <p:grpSpPr>
-        <a:xfrm>
-          <a:off x="0" y="0"/>
-          <a:ext cx="0" cy="0"/>
-          <a:chOff x="0" y="0"/>
-          <a:chExt cx="0" cy="0"/>
-        </a:xfrm>
-      </p:grpSpPr>
-      <p:sp>
-        <p:nvSpPr>
-          <p:cNvPr id="2" name="Slide Image Placeholder 1"/>
-          <p:cNvSpPr>
-            <a:spLocks noGrp="1" noRot="1" noChangeAspect="1"/>
-          </p:cNvSpPr>
-          <p:nvPr>
-            <p:ph type="sldImg"/>
-          </p:nvPr>
-        </p:nvSpPr>
-        <p:spPr/>
-      </p:sp>
-      <p:sp>
-        <p:nvSpPr>
-          <p:cNvPr id="3" name="Notes Placeholder 2"/>
-          <p:cNvSpPr>
-            <a:spLocks noGrp="1"/>
-          </p:cNvSpPr>
-          <p:nvPr>
-            <p:ph type="body" idx="1"/>
-          </p:nvPr>
-        </p:nvSpPr>
-        <p:spPr/>
-        <p:txBody>
-          <a:bodyPr/>
-          <a:lstStyle/>
-          <a:p>
-            <a:r>
-              <a:rPr lang="en-US" dirty="0"/>
-              <a:t>Notas: Amarrar a mini aula antes da demonstração. Cada item volta na prática: a demonstração usa um kit de referência para calibrar o padrão esperado; o estúdio é a própria defesa (10+5 min por estudante, cronômetro visível). Lembrar: hoje é 🔴 CF6 / Projeto Final, 40% da nota final, e a última entrega avaliativa formal da disciplina. Nada do que é avaliado hoje é novo — é a integração do que já foi praticado desde a CF1. Reduzir ansiedade com clareza de formato é o objetivo desta mini aula.</a:t>
-            </a:r>
-            <a:endParaRPr lang="en-US" dirty="0"/>
-          </a:p>
-        </p:txBody>
-      </p:sp>
-      <p:sp>
-        <p:nvSpPr>
-          <p:cNvPr id="4" name="Slide Number Placeholder 3"/>
-          <p:cNvSpPr>
-            <a:spLocks noGrp="1"/>
-          </p:cNvSpPr>
-          <p:nvPr>
-            <p:ph type="sldNum" sz="quarter" idx="10"/>
-          </p:nvPr>
-        </p:nvSpPr>
-        <p:spPr/>
-        <p:txBody>
-          <a:bodyPr/>
-          <a:lstStyle/>
-          <a:p>
-            <a:fld id="{F7021451-1387-4CA6-816F-3879F97B5CBC}" type="slidenum">
-              <a:rPr lang="en-US"/>
-              <a:t>14</a:t>
-            </a:fld>
-            <a:endParaRPr lang="en-US"/>
-          </a:p>
-        </p:txBody>
-      </p:sp>
-    </p:spTree>
-    <p:extLst>
-      <p:ext uri="{BB962C8B-B14F-4D97-AF65-F5344CB8AC3E}">
-        <p14:creationId xmlns:p14="http://schemas.microsoft.com/office/powerpoint/2010/main" val="1024086991"/>
-      </p:ext>
-    </p:extLst>
-  </p:cSld>
-  <p:clrMapOvr>
-    <a:masterClrMapping/>
-  </p:clrMapOvr>
-</p:notes>
-</file>
-
-<file path=ppt/notesSlides/notesSlide15.xml><?xml version="1.0" encoding="utf-8"?>
-<p:notes xmlns:a="http://schemas.openxmlformats.org/drawingml/2006/main" xmlns:r="http://schemas.openxmlformats.org/officeDocument/2006/relationships" xmlns:p="http://schemas.openxmlformats.org/presentationml/2006/main">
-  <p:cSld>
-    <p:spTree>
-      <p:nvGrpSpPr>
-        <p:cNvPr id="1" name=""/>
-        <p:cNvGrpSpPr/>
-        <p:nvPr/>
-      </p:nvGrpSpPr>
-      <p:grpSpPr>
-        <a:xfrm>
-          <a:off x="0" y="0"/>
-          <a:ext cx="0" cy="0"/>
-          <a:chOff x="0" y="0"/>
-          <a:chExt cx="0" cy="0"/>
-        </a:xfrm>
-      </p:grpSpPr>
-      <p:sp>
-        <p:nvSpPr>
-          <p:cNvPr id="2" name="Slide Image Placeholder 1"/>
-          <p:cNvSpPr>
-            <a:spLocks noGrp="1" noRot="1" noChangeAspect="1"/>
-          </p:cNvSpPr>
-          <p:nvPr>
-            <p:ph type="sldImg"/>
-          </p:nvPr>
-        </p:nvSpPr>
-        <p:spPr/>
-      </p:sp>
-      <p:sp>
-        <p:nvSpPr>
-          <p:cNvPr id="3" name="Notes Placeholder 2"/>
-          <p:cNvSpPr>
-            <a:spLocks noGrp="1"/>
-          </p:cNvSpPr>
-          <p:nvPr>
-            <p:ph type="body" idx="1"/>
-          </p:nvPr>
-        </p:nvSpPr>
-        <p:spPr/>
-        <p:txBody>
-          <a:bodyPr/>
-          <a:lstStyle/>
-          <a:p>
-            <a:r>
-              <a:rPr lang="en-US" dirty="0"/>
-              <a:t>Notas: Transição para o bloco de demonstração de 20 min. Não há demonstração técnica nova nesta semana (conforme o cronograma). O professor usa o bloco para apresentar um Kit Modular completo de referência (coorte anterior ou kit próprio preparado antes), percorrendo: (3 min) contextualização como exemplo nível 4–5; (5 min) moodboard e coerência de direção artística → C2; (5 min) breakdown técnico UV, material PBR, textura com narrativa de desgaste, bake sem artefatos → C3, C4, C5, C6; (4 min) cena na Unity e renders → C7, C8; (3 min) estrutura da apresentação do exemplo → C9. Se não houver kit de coorte anterior, usar kit próprio ou documentação de portfólio profissional (com créditos), desde que cubra visivelmente os 10 critérios. O objetivo é calibrar expectativas, não intimidar. Depois disso, o estúdio inicia com 15 min de preparação final e o primeiro bloco de apresentações.
-[!FIGURA]
-Objetivo didático: antecipar o padrão esperado com um exemplo concreto, para a turma reconhecer o nível-alvo antes da própria defesa e da comparação com a autoavaliação.
-Arquivo sugerido: assets/kit_referencia_breakdown.webp
-Descrição: montagem de três painéis de um Kit Modular de referência — (1) moodboard e assets do kit lado a lado, mostrando coerência de direção artística; (2) breakdown técnico de um asset: UV layout, material PBR e textura com desgaste, com o bake sem seams; (3) a cena final montada na Unity sob luz baked, com um render em destaque.
-Como produzir: usar um kit de coorte anterior ou de referência do professor. No Blender/3D Coat, capturar o moodboard, o UV editor e o material do asset; no Unity, capturar a cena montada com iluminação baked e um render final. Compor os três painéis no Krita, numerados 1–2–3, com rótulos "Direção Artística", "Breakdown Técnico" e "Cena Final".</a:t>
-            </a:r>
-            <a:endParaRPr lang="en-US" dirty="0"/>
-          </a:p>
-        </p:txBody>
-      </p:sp>
-      <p:sp>
-        <p:nvSpPr>
-          <p:cNvPr id="4" name="Slide Number Placeholder 3"/>
-          <p:cNvSpPr>
-            <a:spLocks noGrp="1"/>
-          </p:cNvSpPr>
-          <p:nvPr>
-            <p:ph type="sldNum" sz="quarter" idx="10"/>
-          </p:nvPr>
-        </p:nvSpPr>
-        <p:spPr/>
-        <p:txBody>
-          <a:bodyPr/>
-          <a:lstStyle/>
-          <a:p>
-            <a:fld id="{F7021451-1387-4CA6-816F-3879F97B5CBC}" type="slidenum">
-              <a:rPr lang="en-US"/>
-              <a:t>15</a:t>
             </a:fld>
             <a:endParaRPr lang="en-US"/>
           </a:p>
@@ -1137,7 +598,7 @@
           <a:p>
             <a:r>
               <a:rPr lang="en-US" dirty="0"/>
-              <a:t>Notas: Ler rápido. Os seis objetivos vêm direto do plano de aula (itens 1 a 6). Reforçar: hoje NÃO há técnica nova — é a integração de tudo que já foi produzido em uma narrativa defensável. A apresentação de 10+5 min alimenta C9; a justificativa técnica atravessa C1–C8; o feedback aos colegas alimenta C10; a reflexão semestral consolida a metacognição sobre o próprio aprendizado. Nada aqui exige produzir peça nova: exige curar e defender o que já existe.</a:t>
+              <a:t>Notas: Objetivos direto do plano de aula. Reforçar: quem já concluiu todas as entregas do semestre não precisa produzir nada novo — para essas pessoas, a semana é opcional. Quem tem pendências deve já chegar sabendo exatamente o que falta, a partir da comunicação prévia do professor.</a:t>
             </a:r>
             <a:endParaRPr lang="en-US" dirty="0"/>
           </a:p>
@@ -1225,7 +686,7 @@
           <a:p>
             <a:r>
               <a:rPr lang="en-US" dirty="0"/>
-              <a:t>Notas: Pergunta de abertura (do plano de aula). Deixar 2–3 respostas da turma. Usar as respostas para introduzir a ideia central: uma boa defesa NÃO é mostrar tudo — é uma curadoria do próprio processo. Depois de 16 semanas produzindo, hoje vocês vão contar a história desse projeto para quem não acompanhou de perto. O que aparece primeiro é uma escolha editorial. Direcionar para o próximo slide: a apresentação é uma seleção, não um relatório completo das 17 semanas.</a:t>
+              <a:t>Notas: Nota de transição do plano de aula. A Semana 17 é exclusivamente para reposição. Estudantes que já concluíram todas as entregas do semestre não precisam comparecer, conforme combinado institucionalmente — podem usar o tempo para polir o portfólio final, se quiserem.</a:t>
             </a:r>
             <a:endParaRPr lang="en-US" dirty="0"/>
           </a:p>
@@ -1313,7 +774,7 @@
           <a:p>
             <a:r>
               <a:rPr lang="en-US" dirty="0"/>
-              <a:t>Notas: Revisão rápida e nota de transição do plano de aula. Todas as 16 semanas anteriores produziram peças de um mesmo projeto integrador. A Semana 17 não ensina nada tecnicamente novo: pede que o estudante monte essas peças em uma narrativa e as defenda. É, ao mesmo tempo, o encerramento pedagógico da disciplina e a avaliação de maior peso do semestre (CF6, 40% via Projeto Final). Reforçar que o estudante chega hoje sem nenhuma entrega técnica nova a produzir — o kit já está pronto.</a:t>
+              <a:t>Notas: Pergunta de abertura, adaptada do espírito do plano (Possível Dificuldade nº 3: estudante sem clareza sobre o que exatamente está pendente). Usar para checar rapidamente, no início do Encontro 1, quem já sabe sua pendência e quem não recebeu ou não leu a comunicação prévia. Direcionar ao próximo slide: como o atendimento é organizado a partir da lista de pendências.</a:t>
             </a:r>
             <a:endParaRPr lang="en-US" dirty="0"/>
           </a:p>
@@ -1401,7 +862,7 @@
           <a:p>
             <a:r>
               <a:rPr lang="en-US" dirty="0"/>
-              <a:t>Notas: Item central da mini aula. Frase do plano: "Vocês não precisam explicar cada uma das 17 semanas. Escolham o que for mais representativo — a apresentação é uma escolha editorial, não um relatório completo." O erro que se quer prevenir (Possíveis Dificuldades nº 2): tentar mostrar tudo e estourar os 10 minutos. Parte da avaliação de C9 é justamente organizar a fala dentro do tempo dado. Preparar o próximo slide: a estrutura sugerida dos 10 minutos.</a:t>
+              <a:t>Notas: Dinâmica do Encontro 1 (Abertura, 15 min) e Encontro 2. O professor circula entre os estudantes, atendendo um de cada vez ou em pequenos grupos quando a pendência for similar (ex.: vários estudantes com pendência em bake). Prioridade: quem tem mais pendências acumuladas, já que o tempo é finito e não há nova oportunidade formal depois desta semana.</a:t>
             </a:r>
             <a:endParaRPr lang="en-US" dirty="0"/>
           </a:p>
@@ -1489,7 +950,7 @@
           <a:p>
             <a:r>
               <a:rPr lang="en-US" dirty="0"/>
-              <a:t>Notas: Item 1 da mini aula. O GitHub Action converte o mermaid em imagem — por isso o diagrama vai no markdown, não na nota. Detalhar a sequência do plano: (a) tema do kit e referência visual (1–2 min); (b) breakdown de processo — o que mudou da primeira versão até a final, com PELO MENOS um exemplo de feedback incorporado (2–3 min); (c) destaque técnico — 2 ou 3 decisões (UV, material, bake, otimização ou Unity) das quais o estudante mais se orgulha, explicando o porquê (3–4 min); (d) a cena final na Unity com os renders (2 min). Reforçar que a ordem é sugestão; o essencial é que o breakdown mostre evolução e que os destaques venham com justificativa.</a:t>
+              <a:t>Notas: Recursos necessários e papel do estudante. A Semana 17 funciona melhor quando cada estudante já chega sabendo exatamente o que precisa entregar, em vez de descobrir isso no próprio atendimento — daí a importância da comunicação prévia do professor antes desta semana.</a:t>
             </a:r>
             <a:endParaRPr lang="en-US" dirty="0"/>
           </a:p>
@@ -1577,7 +1038,7 @@
           <a:p>
             <a:r>
               <a:rPr lang="en-US" dirty="0"/>
-              <a:t>Notas: Reforço do item 1 (parte b) e ligação com C1. A documentação de processo — moodboard, versões, anotações de crítica, checklists semanais (Instrumento 4) — sustenta C1. Perguntas de mediação do plano para provocar isso na defesa: "Você me mostrou o resultado final desse asset — me conta uma decisão que você tomou no meio do processo e depois mudou. O que te fez mudar?" e "Esse é o mesmo asset que eu vi na Semana 3 com o UV recém-aberto. O que mudou entre aquela versão e essa?". A trajetória do projeto precisa ser rastreável.</a:t>
+              <a:t>Notas: Critérios observados nesta semana, do plano de aula. Esclarecer dúvidas sobre nota acumulada com base no registro de todas as CFs do semestre, sem reabrir entregas já avaliadas e aceitas fora do processo institucional de recurso.</a:t>
             </a:r>
             <a:endParaRPr lang="en-US" dirty="0"/>
           </a:p>
@@ -1665,7 +1126,7 @@
           <a:p>
             <a:r>
               <a:rPr lang="en-US" dirty="0"/>
-              <a:t>Notas: Item 2 da mini aula. Frase do plano: "As perguntas de hoje são as mesmas que vocês já responderam nas cinco críticas formais anteriores — só que agora sobre o projeto inteiro. Vocês já treinaram isso a cada duas ou três semanas desde a CF1." Reforçar que tentativa de justificativa vale mais que silêncio — isso alimenta C10. As perguntas do professor priorizam justificativa técnica ("por que esse valor de roughness aqui?", "o que te fez escolher trim nesse elemento e atlas naquele?"), não sim/não. Tratar a defesa como conversa técnica, não como confronto.</a:t>
+              <a:t>Notas: Amarrar antes do fechamento administrativo. Reforçar: prazo final institucional para qualquer entrega remanescente, e prazos administrativos de lançamento de notas e recurso, se houver, são comunicados individualmente no encerramento do Encontro 2.</a:t>
             </a:r>
             <a:endParaRPr lang="en-US" dirty="0"/>
           </a:p>
@@ -1753,7 +1214,7 @@
           <a:p>
             <a:r>
               <a:rPr lang="en-US" dirty="0"/>
-              <a:t>Notas: Item 3 da mini aula. Frase do plano: "Vocês já foram avaliados nesses critérios separadamente ao longo do semestre. Hoje é a primeira e única vez em que todos aparecem juntos, e a única vez em que a participação nas críticas também vira nota." Objetivo do slide: reduzir ansiedade (Possíveis Dificuldades nº 1) deixando claro que não há conteúdo novo sendo cobrado. A CF6 corresponde ao componente PF da fórmula NF = (PA × 0,40) + (CC × 0,20) + (PF × 0,40); C10 hoje também consolida o fechamento da nota de CC. Preparar o próximo slide: a tabela de pesos e o destaque de C5.</a:t>
+              <a:t>Notas: Fechamento (Encontro 2, 10 min). Recapitular brevemente a trajetória do semestre — do UV inicial ao Kit Modular completo defendido na Semana 16. Informar prazos administrativos finais (lançamento de notas, prazo de recurso, se houver) e agradecer o semestre de trabalho. Esta é a última semana letiva da disciplina — encerrar com tom caloroso, reconhecendo o esforço acumulado da turma.</a:t>
             </a:r>
             <a:endParaRPr lang="en-US" dirty="0"/>
           </a:p>
@@ -2105,240 +1566,6 @@
 <file path=ppt/slides/slide1.xml><?xml version="1.0" encoding="utf-8"?>
 <p:sld xmlns:a="http://schemas.openxmlformats.org/drawingml/2006/main" xmlns:r="http://schemas.openxmlformats.org/officeDocument/2006/relationships" xmlns:p="http://schemas.openxmlformats.org/presentationml/2006/main">
   <p:cSld name="Slide 1">
-    <p:bg>
-      <p:bgPr>
-        <a:blipFill dpi="0" rotWithShape="1">
-          <a:blip r:embed="rId1">
-            <a:lum/>
-          </a:blip>
-          <a:srcRect/>
-          <a:stretch>
-            <a:fillRect/>
-          </a:stretch>
-        </a:blipFill>
-        <a:effectLst/>
-      </p:bgPr>
-    </p:bg>
-    <p:spTree>
-      <p:nvGrpSpPr>
-        <p:cNvPr id="1" name=""/>
-        <p:cNvGrpSpPr/>
-        <p:nvPr/>
-      </p:nvGrpSpPr>
-      <p:grpSpPr>
-        <a:xfrm>
-          <a:off x="0" y="0"/>
-          <a:ext cx="0" cy="0"/>
-          <a:chOff x="0" y="0"/>
-          <a:chExt cx="0" cy="0"/>
-        </a:xfrm>
-      </p:grpSpPr>
-    </p:spTree>
-  </p:cSld>
-  <p:clrMapOvr>
-    <a:masterClrMapping/>
-  </p:clrMapOvr>
-</p:sld>
-</file>
-
-<file path=ppt/slides/slide10.xml><?xml version="1.0" encoding="utf-8"?>
-<p:sld xmlns:a="http://schemas.openxmlformats.org/drawingml/2006/main" xmlns:r="http://schemas.openxmlformats.org/officeDocument/2006/relationships" xmlns:p="http://schemas.openxmlformats.org/presentationml/2006/main">
-  <p:cSld name="Slide 10">
-    <p:bg>
-      <p:bgPr>
-        <a:blipFill dpi="0" rotWithShape="1">
-          <a:blip r:embed="rId1">
-            <a:lum/>
-          </a:blip>
-          <a:srcRect/>
-          <a:stretch>
-            <a:fillRect/>
-          </a:stretch>
-        </a:blipFill>
-        <a:effectLst/>
-      </p:bgPr>
-    </p:bg>
-    <p:spTree>
-      <p:nvGrpSpPr>
-        <p:cNvPr id="1" name=""/>
-        <p:cNvGrpSpPr/>
-        <p:nvPr/>
-      </p:nvGrpSpPr>
-      <p:grpSpPr>
-        <a:xfrm>
-          <a:off x="0" y="0"/>
-          <a:ext cx="0" cy="0"/>
-          <a:chOff x="0" y="0"/>
-          <a:chExt cx="0" cy="0"/>
-        </a:xfrm>
-      </p:grpSpPr>
-    </p:spTree>
-  </p:cSld>
-  <p:clrMapOvr>
-    <a:masterClrMapping/>
-  </p:clrMapOvr>
-</p:sld>
-</file>
-
-<file path=ppt/slides/slide11.xml><?xml version="1.0" encoding="utf-8"?>
-<p:sld xmlns:a="http://schemas.openxmlformats.org/drawingml/2006/main" xmlns:r="http://schemas.openxmlformats.org/officeDocument/2006/relationships" xmlns:p="http://schemas.openxmlformats.org/presentationml/2006/main">
-  <p:cSld name="Slide 11">
-    <p:bg>
-      <p:bgPr>
-        <a:blipFill dpi="0" rotWithShape="1">
-          <a:blip r:embed="rId1">
-            <a:lum/>
-          </a:blip>
-          <a:srcRect/>
-          <a:stretch>
-            <a:fillRect/>
-          </a:stretch>
-        </a:blipFill>
-        <a:effectLst/>
-      </p:bgPr>
-    </p:bg>
-    <p:spTree>
-      <p:nvGrpSpPr>
-        <p:cNvPr id="1" name=""/>
-        <p:cNvGrpSpPr/>
-        <p:nvPr/>
-      </p:nvGrpSpPr>
-      <p:grpSpPr>
-        <a:xfrm>
-          <a:off x="0" y="0"/>
-          <a:ext cx="0" cy="0"/>
-          <a:chOff x="0" y="0"/>
-          <a:chExt cx="0" cy="0"/>
-        </a:xfrm>
-      </p:grpSpPr>
-    </p:spTree>
-  </p:cSld>
-  <p:clrMapOvr>
-    <a:masterClrMapping/>
-  </p:clrMapOvr>
-</p:sld>
-</file>
-
-<file path=ppt/slides/slide12.xml><?xml version="1.0" encoding="utf-8"?>
-<p:sld xmlns:a="http://schemas.openxmlformats.org/drawingml/2006/main" xmlns:r="http://schemas.openxmlformats.org/officeDocument/2006/relationships" xmlns:p="http://schemas.openxmlformats.org/presentationml/2006/main">
-  <p:cSld name="Slide 12">
-    <p:bg>
-      <p:bgPr>
-        <a:blipFill dpi="0" rotWithShape="1">
-          <a:blip r:embed="rId1">
-            <a:lum/>
-          </a:blip>
-          <a:srcRect/>
-          <a:stretch>
-            <a:fillRect/>
-          </a:stretch>
-        </a:blipFill>
-        <a:effectLst/>
-      </p:bgPr>
-    </p:bg>
-    <p:spTree>
-      <p:nvGrpSpPr>
-        <p:cNvPr id="1" name=""/>
-        <p:cNvGrpSpPr/>
-        <p:nvPr/>
-      </p:nvGrpSpPr>
-      <p:grpSpPr>
-        <a:xfrm>
-          <a:off x="0" y="0"/>
-          <a:ext cx="0" cy="0"/>
-          <a:chOff x="0" y="0"/>
-          <a:chExt cx="0" cy="0"/>
-        </a:xfrm>
-      </p:grpSpPr>
-    </p:spTree>
-  </p:cSld>
-  <p:clrMapOvr>
-    <a:masterClrMapping/>
-  </p:clrMapOvr>
-</p:sld>
-</file>
-
-<file path=ppt/slides/slide13.xml><?xml version="1.0" encoding="utf-8"?>
-<p:sld xmlns:a="http://schemas.openxmlformats.org/drawingml/2006/main" xmlns:r="http://schemas.openxmlformats.org/officeDocument/2006/relationships" xmlns:p="http://schemas.openxmlformats.org/presentationml/2006/main">
-  <p:cSld name="Slide 13">
-    <p:bg>
-      <p:bgPr>
-        <a:blipFill dpi="0" rotWithShape="1">
-          <a:blip r:embed="rId1">
-            <a:lum/>
-          </a:blip>
-          <a:srcRect/>
-          <a:stretch>
-            <a:fillRect/>
-          </a:stretch>
-        </a:blipFill>
-        <a:effectLst/>
-      </p:bgPr>
-    </p:bg>
-    <p:spTree>
-      <p:nvGrpSpPr>
-        <p:cNvPr id="1" name=""/>
-        <p:cNvGrpSpPr/>
-        <p:nvPr/>
-      </p:nvGrpSpPr>
-      <p:grpSpPr>
-        <a:xfrm>
-          <a:off x="0" y="0"/>
-          <a:ext cx="0" cy="0"/>
-          <a:chOff x="0" y="0"/>
-          <a:chExt cx="0" cy="0"/>
-        </a:xfrm>
-      </p:grpSpPr>
-    </p:spTree>
-  </p:cSld>
-  <p:clrMapOvr>
-    <a:masterClrMapping/>
-  </p:clrMapOvr>
-</p:sld>
-</file>
-
-<file path=ppt/slides/slide14.xml><?xml version="1.0" encoding="utf-8"?>
-<p:sld xmlns:a="http://schemas.openxmlformats.org/drawingml/2006/main" xmlns:r="http://schemas.openxmlformats.org/officeDocument/2006/relationships" xmlns:p="http://schemas.openxmlformats.org/presentationml/2006/main">
-  <p:cSld name="Slide 14">
-    <p:bg>
-      <p:bgPr>
-        <a:blipFill dpi="0" rotWithShape="1">
-          <a:blip r:embed="rId1">
-            <a:lum/>
-          </a:blip>
-          <a:srcRect/>
-          <a:stretch>
-            <a:fillRect/>
-          </a:stretch>
-        </a:blipFill>
-        <a:effectLst/>
-      </p:bgPr>
-    </p:bg>
-    <p:spTree>
-      <p:nvGrpSpPr>
-        <p:cNvPr id="1" name=""/>
-        <p:cNvGrpSpPr/>
-        <p:nvPr/>
-      </p:nvGrpSpPr>
-      <p:grpSpPr>
-        <a:xfrm>
-          <a:off x="0" y="0"/>
-          <a:ext cx="0" cy="0"/>
-          <a:chOff x="0" y="0"/>
-          <a:chExt cx="0" cy="0"/>
-        </a:xfrm>
-      </p:grpSpPr>
-    </p:spTree>
-  </p:cSld>
-  <p:clrMapOvr>
-    <a:masterClrMapping/>
-  </p:clrMapOvr>
-</p:sld>
-</file>
-
-<file path=ppt/slides/slide15.xml><?xml version="1.0" encoding="utf-8"?>
-<p:sld xmlns:a="http://schemas.openxmlformats.org/drawingml/2006/main" xmlns:r="http://schemas.openxmlformats.org/officeDocument/2006/relationships" xmlns:p="http://schemas.openxmlformats.org/presentationml/2006/main">
-  <p:cSld name="Slide 15">
     <p:bg>
       <p:bgPr>
         <a:blipFill dpi="0" rotWithShape="1">
